--- a/Novosibirsk_State_University/Английский язык/7 семестр/Homework/Digital technologies.pptx
+++ b/Novosibirsk_State_University/Английский язык/7 семестр/Homework/Digital technologies.pptx
@@ -5,7 +5,7 @@
     <p:sldMasterId id="2147483648" r:id="rId1"/>
   </p:sldMasterIdLst>
   <p:notesMasterIdLst>
-    <p:notesMasterId r:id="rId8"/>
+    <p:notesMasterId r:id="rId9"/>
   </p:notesMasterIdLst>
   <p:sldIdLst>
     <p:sldId id="256" r:id="rId2"/>
@@ -13,7 +13,8 @@
     <p:sldId id="259" r:id="rId4"/>
     <p:sldId id="257" r:id="rId5"/>
     <p:sldId id="258" r:id="rId6"/>
-    <p:sldId id="260" r:id="rId7"/>
+    <p:sldId id="262" r:id="rId7"/>
+    <p:sldId id="260" r:id="rId8"/>
   </p:sldIdLst>
   <p:sldSz cx="12192000" cy="6858000"/>
   <p:notesSz cx="6858000" cy="9144000"/>
@@ -202,7 +203,7 @@
           <a:p>
             <a:fld id="{5E056DB8-892C-4C28-93BF-C18DF5B7CDFD}" type="datetimeFigureOut">
               <a:rPr lang="ru-RU" smtClean="0"/>
-              <a:t>24.10.2025</a:t>
+              <a:t>19.12.2025</a:t>
             </a:fld>
             <a:endParaRPr lang="ru-RU"/>
           </a:p>
@@ -700,7 +701,7 @@
           <a:p>
             <a:fld id="{64CE43B8-2F0A-49A0-B18A-8CE394CF327D}" type="datetimeFigureOut">
               <a:rPr lang="ru-RU" smtClean="0"/>
-              <a:t>24.10.2025</a:t>
+              <a:t>19.12.2025</a:t>
             </a:fld>
             <a:endParaRPr lang="ru-RU"/>
           </a:p>
@@ -898,7 +899,7 @@
           <a:p>
             <a:fld id="{64CE43B8-2F0A-49A0-B18A-8CE394CF327D}" type="datetimeFigureOut">
               <a:rPr lang="ru-RU" smtClean="0"/>
-              <a:t>24.10.2025</a:t>
+              <a:t>19.12.2025</a:t>
             </a:fld>
             <a:endParaRPr lang="ru-RU"/>
           </a:p>
@@ -1106,7 +1107,7 @@
           <a:p>
             <a:fld id="{64CE43B8-2F0A-49A0-B18A-8CE394CF327D}" type="datetimeFigureOut">
               <a:rPr lang="ru-RU" smtClean="0"/>
-              <a:t>24.10.2025</a:t>
+              <a:t>19.12.2025</a:t>
             </a:fld>
             <a:endParaRPr lang="ru-RU"/>
           </a:p>
@@ -1304,7 +1305,7 @@
           <a:p>
             <a:fld id="{64CE43B8-2F0A-49A0-B18A-8CE394CF327D}" type="datetimeFigureOut">
               <a:rPr lang="ru-RU" smtClean="0"/>
-              <a:t>24.10.2025</a:t>
+              <a:t>19.12.2025</a:t>
             </a:fld>
             <a:endParaRPr lang="ru-RU"/>
           </a:p>
@@ -1579,7 +1580,7 @@
           <a:p>
             <a:fld id="{64CE43B8-2F0A-49A0-B18A-8CE394CF327D}" type="datetimeFigureOut">
               <a:rPr lang="ru-RU" smtClean="0"/>
-              <a:t>24.10.2025</a:t>
+              <a:t>19.12.2025</a:t>
             </a:fld>
             <a:endParaRPr lang="ru-RU"/>
           </a:p>
@@ -1844,7 +1845,7 @@
           <a:p>
             <a:fld id="{64CE43B8-2F0A-49A0-B18A-8CE394CF327D}" type="datetimeFigureOut">
               <a:rPr lang="ru-RU" smtClean="0"/>
-              <a:t>24.10.2025</a:t>
+              <a:t>19.12.2025</a:t>
             </a:fld>
             <a:endParaRPr lang="ru-RU"/>
           </a:p>
@@ -2256,7 +2257,7 @@
           <a:p>
             <a:fld id="{64CE43B8-2F0A-49A0-B18A-8CE394CF327D}" type="datetimeFigureOut">
               <a:rPr lang="ru-RU" smtClean="0"/>
-              <a:t>24.10.2025</a:t>
+              <a:t>19.12.2025</a:t>
             </a:fld>
             <a:endParaRPr lang="ru-RU"/>
           </a:p>
@@ -2397,7 +2398,7 @@
           <a:p>
             <a:fld id="{64CE43B8-2F0A-49A0-B18A-8CE394CF327D}" type="datetimeFigureOut">
               <a:rPr lang="ru-RU" smtClean="0"/>
-              <a:t>24.10.2025</a:t>
+              <a:t>19.12.2025</a:t>
             </a:fld>
             <a:endParaRPr lang="ru-RU"/>
           </a:p>
@@ -2510,7 +2511,7 @@
           <a:p>
             <a:fld id="{64CE43B8-2F0A-49A0-B18A-8CE394CF327D}" type="datetimeFigureOut">
               <a:rPr lang="ru-RU" smtClean="0"/>
-              <a:t>24.10.2025</a:t>
+              <a:t>19.12.2025</a:t>
             </a:fld>
             <a:endParaRPr lang="ru-RU"/>
           </a:p>
@@ -2821,7 +2822,7 @@
           <a:p>
             <a:fld id="{64CE43B8-2F0A-49A0-B18A-8CE394CF327D}" type="datetimeFigureOut">
               <a:rPr lang="ru-RU" smtClean="0"/>
-              <a:t>24.10.2025</a:t>
+              <a:t>19.12.2025</a:t>
             </a:fld>
             <a:endParaRPr lang="ru-RU"/>
           </a:p>
@@ -3109,7 +3110,7 @@
           <a:p>
             <a:fld id="{64CE43B8-2F0A-49A0-B18A-8CE394CF327D}" type="datetimeFigureOut">
               <a:rPr lang="ru-RU" smtClean="0"/>
-              <a:t>24.10.2025</a:t>
+              <a:t>19.12.2025</a:t>
             </a:fld>
             <a:endParaRPr lang="ru-RU"/>
           </a:p>
@@ -3350,7 +3351,7 @@
           <a:p>
             <a:fld id="{64CE43B8-2F0A-49A0-B18A-8CE394CF327D}" type="datetimeFigureOut">
               <a:rPr lang="ru-RU" smtClean="0"/>
-              <a:t>24.10.2025</a:t>
+              <a:t>19.12.2025</a:t>
             </a:fld>
             <a:endParaRPr lang="ru-RU"/>
           </a:p>
@@ -3800,6 +3801,8 @@
                 <a:solidFill>
                   <a:srgbClr val="0070C0"/>
                 </a:solidFill>
+                <a:latin typeface="Times New Roman" panose="02020603050405020304" pitchFamily="18" charset="0"/>
+                <a:cs typeface="Times New Roman" panose="02020603050405020304" pitchFamily="18" charset="0"/>
               </a:rPr>
               <a:t>The evolution of AI</a:t>
             </a:r>
@@ -3807,6 +3810,8 @@
               <a:solidFill>
                 <a:srgbClr val="0070C0"/>
               </a:solidFill>
+              <a:latin typeface="Times New Roman" panose="02020603050405020304" pitchFamily="18" charset="0"/>
+              <a:cs typeface="Times New Roman" panose="02020603050405020304" pitchFamily="18" charset="0"/>
             </a:endParaRPr>
           </a:p>
         </p:txBody>
@@ -3866,10 +3871,16 @@
           <a:p>
             <a:pPr algn="ctr"/>
             <a:r>
-              <a:rPr lang="en-US" sz="7200" dirty="0"/>
+              <a:rPr lang="en-US" sz="7200" dirty="0">
+                <a:latin typeface="Times New Roman" panose="02020603050405020304" pitchFamily="18" charset="0"/>
+                <a:cs typeface="Times New Roman" panose="02020603050405020304" pitchFamily="18" charset="0"/>
+              </a:rPr>
               <a:t>Presentation plan</a:t>
             </a:r>
-            <a:endParaRPr lang="ru-RU" sz="7200" dirty="0"/>
+            <a:endParaRPr lang="ru-RU" sz="7200" dirty="0">
+              <a:latin typeface="Times New Roman" panose="02020603050405020304" pitchFamily="18" charset="0"/>
+              <a:cs typeface="Times New Roman" panose="02020603050405020304" pitchFamily="18" charset="0"/>
+            </a:endParaRPr>
           </a:p>
         </p:txBody>
       </p:sp>
@@ -3896,7 +3907,9 @@
           </a:xfrm>
         </p:spPr>
         <p:txBody>
-          <a:bodyPr/>
+          <a:bodyPr>
+            <a:normAutofit fontScale="92500" lnSpcReduction="10000"/>
+          </a:bodyPr>
           <a:lstStyle/>
           <a:p>
             <a:pPr>
@@ -3905,10 +3918,16 @@
               </a:lnSpc>
             </a:pPr>
             <a:r>
-              <a:rPr lang="en-US" dirty="0"/>
+              <a:rPr lang="en-US" dirty="0">
+                <a:latin typeface="Times New Roman" panose="02020603050405020304" pitchFamily="18" charset="0"/>
+                <a:cs typeface="Times New Roman" panose="02020603050405020304" pitchFamily="18" charset="0"/>
+              </a:rPr>
               <a:t>First attempts to create AI</a:t>
             </a:r>
-            <a:endParaRPr lang="ru-RU" dirty="0"/>
+            <a:endParaRPr lang="ru-RU" dirty="0">
+              <a:latin typeface="Times New Roman" panose="02020603050405020304" pitchFamily="18" charset="0"/>
+              <a:cs typeface="Times New Roman" panose="02020603050405020304" pitchFamily="18" charset="0"/>
+            </a:endParaRPr>
           </a:p>
           <a:p>
             <a:pPr>
@@ -3917,10 +3936,16 @@
               </a:lnSpc>
             </a:pPr>
             <a:r>
-              <a:rPr lang="en-US" dirty="0"/>
+              <a:rPr lang="en-US" dirty="0">
+                <a:latin typeface="Times New Roman" panose="02020603050405020304" pitchFamily="18" charset="0"/>
+                <a:cs typeface="Times New Roman" panose="02020603050405020304" pitchFamily="18" charset="0"/>
+              </a:rPr>
               <a:t>Key stages of development</a:t>
             </a:r>
-            <a:endParaRPr lang="ru-RU" dirty="0"/>
+            <a:endParaRPr lang="ru-RU" dirty="0">
+              <a:latin typeface="Times New Roman" panose="02020603050405020304" pitchFamily="18" charset="0"/>
+              <a:cs typeface="Times New Roman" panose="02020603050405020304" pitchFamily="18" charset="0"/>
+            </a:endParaRPr>
           </a:p>
           <a:p>
             <a:pPr>
@@ -3929,10 +3954,30 @@
               </a:lnSpc>
             </a:pPr>
             <a:r>
-              <a:rPr lang="en-US" sz="2800" dirty="0"/>
+              <a:rPr lang="en-US" sz="2800" dirty="0">
+                <a:latin typeface="Times New Roman" panose="02020603050405020304" pitchFamily="18" charset="0"/>
+                <a:cs typeface="Times New Roman" panose="02020603050405020304" pitchFamily="18" charset="0"/>
+              </a:rPr>
               <a:t>What is AI today?</a:t>
             </a:r>
-            <a:endParaRPr lang="ru-RU" dirty="0"/>
+          </a:p>
+          <a:p>
+            <a:pPr>
+              <a:lnSpc>
+                <a:spcPct val="250000"/>
+              </a:lnSpc>
+            </a:pPr>
+            <a:r>
+              <a:rPr lang="en-US" dirty="0">
+                <a:latin typeface="Times New Roman" panose="02020603050405020304" pitchFamily="18" charset="0"/>
+                <a:cs typeface="Times New Roman" panose="02020603050405020304" pitchFamily="18" charset="0"/>
+              </a:rPr>
+              <a:t>Conclusion</a:t>
+            </a:r>
+            <a:endParaRPr lang="ru-RU" dirty="0">
+              <a:latin typeface="Times New Roman" panose="02020603050405020304" pitchFamily="18" charset="0"/>
+              <a:cs typeface="Times New Roman" panose="02020603050405020304" pitchFamily="18" charset="0"/>
+            </a:endParaRPr>
           </a:p>
         </p:txBody>
       </p:sp>
@@ -3991,10 +4036,16 @@
           <a:p>
             <a:pPr algn="ctr"/>
             <a:r>
-              <a:rPr lang="en-US" sz="7200" dirty="0"/>
+              <a:rPr lang="en-US" sz="7200" dirty="0">
+                <a:latin typeface="Times New Roman" panose="02020603050405020304" pitchFamily="18" charset="0"/>
+                <a:cs typeface="Times New Roman" panose="02020603050405020304" pitchFamily="18" charset="0"/>
+              </a:rPr>
               <a:t>First attempts to create AI</a:t>
             </a:r>
-            <a:endParaRPr lang="ru-RU" sz="7200" dirty="0"/>
+            <a:endParaRPr lang="ru-RU" sz="7200" dirty="0">
+              <a:latin typeface="Times New Roman" panose="02020603050405020304" pitchFamily="18" charset="0"/>
+              <a:cs typeface="Times New Roman" panose="02020603050405020304" pitchFamily="18" charset="0"/>
+            </a:endParaRPr>
           </a:p>
         </p:txBody>
       </p:sp>
@@ -4147,10 +4198,16 @@
           <a:p>
             <a:pPr algn="ctr"/>
             <a:r>
-              <a:rPr lang="en-US" sz="7200" dirty="0"/>
+              <a:rPr lang="en-US" sz="7200" dirty="0">
+                <a:latin typeface="Times New Roman" panose="02020603050405020304" pitchFamily="18" charset="0"/>
+                <a:cs typeface="Times New Roman" panose="02020603050405020304" pitchFamily="18" charset="0"/>
+              </a:rPr>
               <a:t>Key stages of development</a:t>
             </a:r>
-            <a:endParaRPr lang="ru-RU" sz="7200" dirty="0"/>
+            <a:endParaRPr lang="ru-RU" sz="7200" dirty="0">
+              <a:latin typeface="Times New Roman" panose="02020603050405020304" pitchFamily="18" charset="0"/>
+              <a:cs typeface="Times New Roman" panose="02020603050405020304" pitchFamily="18" charset="0"/>
+            </a:endParaRPr>
           </a:p>
         </p:txBody>
       </p:sp>
@@ -4188,10 +4245,16 @@
               </a:lnSpc>
             </a:pPr>
             <a:r>
-              <a:rPr lang="en-US" dirty="0"/>
+              <a:rPr lang="en-US" dirty="0">
+                <a:latin typeface="Times New Roman" panose="02020603050405020304" pitchFamily="18" charset="0"/>
+                <a:cs typeface="Times New Roman" panose="02020603050405020304" pitchFamily="18" charset="0"/>
+              </a:rPr>
               <a:t>Symbolic AI (1950s-1980s)</a:t>
             </a:r>
-            <a:endParaRPr lang="ru-RU" dirty="0"/>
+            <a:endParaRPr lang="ru-RU" dirty="0">
+              <a:latin typeface="Times New Roman" panose="02020603050405020304" pitchFamily="18" charset="0"/>
+              <a:cs typeface="Times New Roman" panose="02020603050405020304" pitchFamily="18" charset="0"/>
+            </a:endParaRPr>
           </a:p>
           <a:p>
             <a:pPr>
@@ -4200,10 +4263,16 @@
               </a:lnSpc>
             </a:pPr>
             <a:r>
-              <a:rPr lang="en-US" dirty="0"/>
+              <a:rPr lang="en-US" dirty="0">
+                <a:latin typeface="Times New Roman" panose="02020603050405020304" pitchFamily="18" charset="0"/>
+                <a:cs typeface="Times New Roman" panose="02020603050405020304" pitchFamily="18" charset="0"/>
+              </a:rPr>
               <a:t>Statistical Learning (1980s-2010s)</a:t>
             </a:r>
-            <a:endParaRPr lang="ru-RU" dirty="0"/>
+            <a:endParaRPr lang="ru-RU" dirty="0">
+              <a:latin typeface="Times New Roman" panose="02020603050405020304" pitchFamily="18" charset="0"/>
+              <a:cs typeface="Times New Roman" panose="02020603050405020304" pitchFamily="18" charset="0"/>
+            </a:endParaRPr>
           </a:p>
           <a:p>
             <a:pPr>
@@ -4212,10 +4281,16 @@
               </a:lnSpc>
             </a:pPr>
             <a:r>
-              <a:rPr lang="en-US" dirty="0"/>
+              <a:rPr lang="en-US" dirty="0">
+                <a:latin typeface="Times New Roman" panose="02020603050405020304" pitchFamily="18" charset="0"/>
+                <a:cs typeface="Times New Roman" panose="02020603050405020304" pitchFamily="18" charset="0"/>
+              </a:rPr>
               <a:t>Deep Learning (2010s-Present)</a:t>
             </a:r>
-            <a:endParaRPr lang="ru-RU" dirty="0"/>
+            <a:endParaRPr lang="ru-RU" dirty="0">
+              <a:latin typeface="Times New Roman" panose="02020603050405020304" pitchFamily="18" charset="0"/>
+              <a:cs typeface="Times New Roman" panose="02020603050405020304" pitchFamily="18" charset="0"/>
+            </a:endParaRPr>
           </a:p>
           <a:p>
             <a:pPr>
@@ -4224,10 +4299,16 @@
               </a:lnSpc>
             </a:pPr>
             <a:r>
-              <a:rPr lang="en-US" dirty="0"/>
+              <a:rPr lang="en-US" dirty="0">
+                <a:latin typeface="Times New Roman" panose="02020603050405020304" pitchFamily="18" charset="0"/>
+                <a:cs typeface="Times New Roman" panose="02020603050405020304" pitchFamily="18" charset="0"/>
+              </a:rPr>
               <a:t>Generative AI &amp; Foundation Models (Present)</a:t>
             </a:r>
-            <a:endParaRPr lang="ru-RU" dirty="0"/>
+            <a:endParaRPr lang="ru-RU" dirty="0">
+              <a:latin typeface="Times New Roman" panose="02020603050405020304" pitchFamily="18" charset="0"/>
+              <a:cs typeface="Times New Roman" panose="02020603050405020304" pitchFamily="18" charset="0"/>
+            </a:endParaRPr>
           </a:p>
         </p:txBody>
       </p:sp>
@@ -4380,10 +4461,16 @@
           <a:p>
             <a:pPr algn="ctr"/>
             <a:r>
-              <a:rPr lang="en-US" sz="7200" dirty="0"/>
+              <a:rPr lang="en-US" sz="7200" dirty="0">
+                <a:latin typeface="Times New Roman" panose="02020603050405020304" pitchFamily="18" charset="0"/>
+                <a:cs typeface="Times New Roman" panose="02020603050405020304" pitchFamily="18" charset="0"/>
+              </a:rPr>
               <a:t>What is AI today?</a:t>
             </a:r>
-            <a:endParaRPr lang="ru-RU" sz="7200" dirty="0"/>
+            <a:endParaRPr lang="ru-RU" sz="7200" dirty="0">
+              <a:latin typeface="Times New Roman" panose="02020603050405020304" pitchFamily="18" charset="0"/>
+              <a:cs typeface="Times New Roman" panose="02020603050405020304" pitchFamily="18" charset="0"/>
+            </a:endParaRPr>
           </a:p>
         </p:txBody>
       </p:sp>
@@ -4795,6 +4882,104 @@
       </p:grpSpPr>
       <p:sp>
         <p:nvSpPr>
+          <p:cNvPr id="2" name="Заголовок 1">
+            <a:extLst>
+              <a:ext uri="{FF2B5EF4-FFF2-40B4-BE49-F238E27FC236}">
+                <a16:creationId xmlns:a16="http://schemas.microsoft.com/office/drawing/2014/main" id="{FB179DE4-ADAB-40D4-8219-CF53FA705403}"/>
+              </a:ext>
+            </a:extLst>
+          </p:cNvPr>
+          <p:cNvSpPr>
+            <a:spLocks noGrp="1"/>
+          </p:cNvSpPr>
+          <p:nvPr>
+            <p:ph type="title"/>
+          </p:nvPr>
+        </p:nvSpPr>
+        <p:spPr/>
+        <p:txBody>
+          <a:bodyPr>
+            <a:normAutofit/>
+          </a:bodyPr>
+          <a:lstStyle/>
+          <a:p>
+            <a:pPr algn="ctr"/>
+            <a:r>
+              <a:rPr lang="en-US" sz="7200" dirty="0">
+                <a:latin typeface="Times New Roman" panose="02020603050405020304" pitchFamily="18" charset="0"/>
+                <a:cs typeface="Times New Roman" panose="02020603050405020304" pitchFamily="18" charset="0"/>
+              </a:rPr>
+              <a:t>Conclusion</a:t>
+            </a:r>
+            <a:endParaRPr lang="ru-RU" sz="7200" dirty="0">
+              <a:latin typeface="Times New Roman" panose="02020603050405020304" pitchFamily="18" charset="0"/>
+              <a:cs typeface="Times New Roman" panose="02020603050405020304" pitchFamily="18" charset="0"/>
+            </a:endParaRPr>
+          </a:p>
+        </p:txBody>
+      </p:sp>
+      <p:pic>
+        <p:nvPicPr>
+          <p:cNvPr id="4" name="Рисунок 3">
+            <a:extLst>
+              <a:ext uri="{FF2B5EF4-FFF2-40B4-BE49-F238E27FC236}">
+                <a16:creationId xmlns:a16="http://schemas.microsoft.com/office/drawing/2014/main" id="{FA546339-6A7A-44AF-9E34-DFA0D34B9342}"/>
+              </a:ext>
+            </a:extLst>
+          </p:cNvPr>
+          <p:cNvPicPr>
+            <a:picLocks noChangeAspect="1"/>
+          </p:cNvPicPr>
+          <p:nvPr/>
+        </p:nvPicPr>
+        <p:blipFill>
+          <a:blip r:embed="rId2"/>
+          <a:stretch>
+            <a:fillRect/>
+          </a:stretch>
+        </p:blipFill>
+        <p:spPr>
+          <a:xfrm>
+            <a:off x="1416000" y="1690688"/>
+            <a:ext cx="9360000" cy="4680000"/>
+          </a:xfrm>
+          <a:prstGeom prst="rect">
+            <a:avLst/>
+          </a:prstGeom>
+        </p:spPr>
+      </p:pic>
+    </p:spTree>
+    <p:extLst>
+      <p:ext uri="{BB962C8B-B14F-4D97-AF65-F5344CB8AC3E}">
+        <p14:creationId xmlns:p14="http://schemas.microsoft.com/office/powerpoint/2010/main" val="3649586768"/>
+      </p:ext>
+    </p:extLst>
+  </p:cSld>
+  <p:clrMapOvr>
+    <a:masterClrMapping/>
+  </p:clrMapOvr>
+</p:sld>
+</file>
+
+<file path=ppt/slides/slide7.xml><?xml version="1.0" encoding="utf-8"?>
+<p:sld xmlns:a="http://schemas.openxmlformats.org/drawingml/2006/main" xmlns:r="http://schemas.openxmlformats.org/officeDocument/2006/relationships" xmlns:p="http://schemas.openxmlformats.org/presentationml/2006/main">
+  <p:cSld>
+    <p:spTree>
+      <p:nvGrpSpPr>
+        <p:cNvPr id="1" name=""/>
+        <p:cNvGrpSpPr/>
+        <p:nvPr/>
+      </p:nvGrpSpPr>
+      <p:grpSpPr>
+        <a:xfrm>
+          <a:off x="0" y="0"/>
+          <a:ext cx="0" cy="0"/>
+          <a:chOff x="0" y="0"/>
+          <a:chExt cx="0" cy="0"/>
+        </a:xfrm>
+      </p:grpSpPr>
+      <p:sp>
+        <p:nvSpPr>
           <p:cNvPr id="4" name="Заголовок 3">
             <a:extLst>
               <a:ext uri="{FF2B5EF4-FFF2-40B4-BE49-F238E27FC236}">
@@ -4827,6 +5012,8 @@
                 <a:solidFill>
                   <a:srgbClr val="FF0000"/>
                 </a:solidFill>
+                <a:latin typeface="Times New Roman" panose="02020603050405020304" pitchFamily="18" charset="0"/>
+                <a:cs typeface="Times New Roman" panose="02020603050405020304" pitchFamily="18" charset="0"/>
               </a:rPr>
               <a:t>Thank you for your attention</a:t>
             </a:r>
@@ -4835,6 +5022,8 @@
                 <a:solidFill>
                   <a:srgbClr val="FF0000"/>
                 </a:solidFill>
+                <a:latin typeface="Times New Roman" panose="02020603050405020304" pitchFamily="18" charset="0"/>
+                <a:cs typeface="Times New Roman" panose="02020603050405020304" pitchFamily="18" charset="0"/>
               </a:rPr>
               <a:t>!</a:t>
             </a:r>

--- a/Novosibirsk_State_University/Английский язык/7 семестр/Homework/Digital technologies.pptx
+++ b/Novosibirsk_State_University/Английский язык/7 семестр/Homework/Digital technologies.pptx
@@ -203,7 +203,7 @@
           <a:p>
             <a:fld id="{5E056DB8-892C-4C28-93BF-C18DF5B7CDFD}" type="datetimeFigureOut">
               <a:rPr lang="ru-RU" smtClean="0"/>
-              <a:t>19.12.2025</a:t>
+              <a:t>21.12.2025</a:t>
             </a:fld>
             <a:endParaRPr lang="ru-RU"/>
           </a:p>
@@ -701,7 +701,7 @@
           <a:p>
             <a:fld id="{64CE43B8-2F0A-49A0-B18A-8CE394CF327D}" type="datetimeFigureOut">
               <a:rPr lang="ru-RU" smtClean="0"/>
-              <a:t>19.12.2025</a:t>
+              <a:t>21.12.2025</a:t>
             </a:fld>
             <a:endParaRPr lang="ru-RU"/>
           </a:p>
@@ -899,7 +899,7 @@
           <a:p>
             <a:fld id="{64CE43B8-2F0A-49A0-B18A-8CE394CF327D}" type="datetimeFigureOut">
               <a:rPr lang="ru-RU" smtClean="0"/>
-              <a:t>19.12.2025</a:t>
+              <a:t>21.12.2025</a:t>
             </a:fld>
             <a:endParaRPr lang="ru-RU"/>
           </a:p>
@@ -1107,7 +1107,7 @@
           <a:p>
             <a:fld id="{64CE43B8-2F0A-49A0-B18A-8CE394CF327D}" type="datetimeFigureOut">
               <a:rPr lang="ru-RU" smtClean="0"/>
-              <a:t>19.12.2025</a:t>
+              <a:t>21.12.2025</a:t>
             </a:fld>
             <a:endParaRPr lang="ru-RU"/>
           </a:p>
@@ -1305,7 +1305,7 @@
           <a:p>
             <a:fld id="{64CE43B8-2F0A-49A0-B18A-8CE394CF327D}" type="datetimeFigureOut">
               <a:rPr lang="ru-RU" smtClean="0"/>
-              <a:t>19.12.2025</a:t>
+              <a:t>21.12.2025</a:t>
             </a:fld>
             <a:endParaRPr lang="ru-RU"/>
           </a:p>
@@ -1580,7 +1580,7 @@
           <a:p>
             <a:fld id="{64CE43B8-2F0A-49A0-B18A-8CE394CF327D}" type="datetimeFigureOut">
               <a:rPr lang="ru-RU" smtClean="0"/>
-              <a:t>19.12.2025</a:t>
+              <a:t>21.12.2025</a:t>
             </a:fld>
             <a:endParaRPr lang="ru-RU"/>
           </a:p>
@@ -1845,7 +1845,7 @@
           <a:p>
             <a:fld id="{64CE43B8-2F0A-49A0-B18A-8CE394CF327D}" type="datetimeFigureOut">
               <a:rPr lang="ru-RU" smtClean="0"/>
-              <a:t>19.12.2025</a:t>
+              <a:t>21.12.2025</a:t>
             </a:fld>
             <a:endParaRPr lang="ru-RU"/>
           </a:p>
@@ -2257,7 +2257,7 @@
           <a:p>
             <a:fld id="{64CE43B8-2F0A-49A0-B18A-8CE394CF327D}" type="datetimeFigureOut">
               <a:rPr lang="ru-RU" smtClean="0"/>
-              <a:t>19.12.2025</a:t>
+              <a:t>21.12.2025</a:t>
             </a:fld>
             <a:endParaRPr lang="ru-RU"/>
           </a:p>
@@ -2398,7 +2398,7 @@
           <a:p>
             <a:fld id="{64CE43B8-2F0A-49A0-B18A-8CE394CF327D}" type="datetimeFigureOut">
               <a:rPr lang="ru-RU" smtClean="0"/>
-              <a:t>19.12.2025</a:t>
+              <a:t>21.12.2025</a:t>
             </a:fld>
             <a:endParaRPr lang="ru-RU"/>
           </a:p>
@@ -2511,7 +2511,7 @@
           <a:p>
             <a:fld id="{64CE43B8-2F0A-49A0-B18A-8CE394CF327D}" type="datetimeFigureOut">
               <a:rPr lang="ru-RU" smtClean="0"/>
-              <a:t>19.12.2025</a:t>
+              <a:t>21.12.2025</a:t>
             </a:fld>
             <a:endParaRPr lang="ru-RU"/>
           </a:p>
@@ -2822,7 +2822,7 @@
           <a:p>
             <a:fld id="{64CE43B8-2F0A-49A0-B18A-8CE394CF327D}" type="datetimeFigureOut">
               <a:rPr lang="ru-RU" smtClean="0"/>
-              <a:t>19.12.2025</a:t>
+              <a:t>21.12.2025</a:t>
             </a:fld>
             <a:endParaRPr lang="ru-RU"/>
           </a:p>
@@ -3110,7 +3110,7 @@
           <a:p>
             <a:fld id="{64CE43B8-2F0A-49A0-B18A-8CE394CF327D}" type="datetimeFigureOut">
               <a:rPr lang="ru-RU" smtClean="0"/>
-              <a:t>19.12.2025</a:t>
+              <a:t>21.12.2025</a:t>
             </a:fld>
             <a:endParaRPr lang="ru-RU"/>
           </a:p>
@@ -3351,7 +3351,7 @@
           <a:p>
             <a:fld id="{64CE43B8-2F0A-49A0-B18A-8CE394CF327D}" type="datetimeFigureOut">
               <a:rPr lang="ru-RU" smtClean="0"/>
-              <a:t>19.12.2025</a:t>
+              <a:t>21.12.2025</a:t>
             </a:fld>
             <a:endParaRPr lang="ru-RU"/>
           </a:p>
@@ -3791,13 +3791,13 @@
           </a:xfrm>
         </p:spPr>
         <p:txBody>
-          <a:bodyPr>
+          <a:bodyPr anchor="ctr">
             <a:normAutofit/>
           </a:bodyPr>
           <a:lstStyle/>
           <a:p>
             <a:r>
-              <a:rPr lang="en-US" sz="8000" b="1" dirty="0">
+              <a:rPr lang="en-US" sz="7200" b="1" dirty="0">
                 <a:solidFill>
                   <a:srgbClr val="0070C0"/>
                 </a:solidFill>
@@ -3806,7 +3806,7 @@
               </a:rPr>
               <a:t>The evolution of AI</a:t>
             </a:r>
-            <a:endParaRPr lang="ru-RU" sz="8000" b="1" dirty="0">
+            <a:endParaRPr lang="ru-RU" sz="7200" b="1" dirty="0">
               <a:solidFill>
                 <a:srgbClr val="0070C0"/>
               </a:solidFill>

--- a/Novosibirsk_State_University/Английский язык/7 семестр/Homework/Digital technologies.pptx
+++ b/Novosibirsk_State_University/Английский язык/7 семестр/Homework/Digital technologies.pptx
@@ -203,7 +203,7 @@
           <a:p>
             <a:fld id="{5E056DB8-892C-4C28-93BF-C18DF5B7CDFD}" type="datetimeFigureOut">
               <a:rPr lang="ru-RU" smtClean="0"/>
-              <a:t>21.12.2025</a:t>
+              <a:t>09.01.2026</a:t>
             </a:fld>
             <a:endParaRPr lang="ru-RU"/>
           </a:p>
@@ -701,7 +701,7 @@
           <a:p>
             <a:fld id="{64CE43B8-2F0A-49A0-B18A-8CE394CF327D}" type="datetimeFigureOut">
               <a:rPr lang="ru-RU" smtClean="0"/>
-              <a:t>21.12.2025</a:t>
+              <a:t>09.01.2026</a:t>
             </a:fld>
             <a:endParaRPr lang="ru-RU"/>
           </a:p>
@@ -899,7 +899,7 @@
           <a:p>
             <a:fld id="{64CE43B8-2F0A-49A0-B18A-8CE394CF327D}" type="datetimeFigureOut">
               <a:rPr lang="ru-RU" smtClean="0"/>
-              <a:t>21.12.2025</a:t>
+              <a:t>09.01.2026</a:t>
             </a:fld>
             <a:endParaRPr lang="ru-RU"/>
           </a:p>
@@ -1107,7 +1107,7 @@
           <a:p>
             <a:fld id="{64CE43B8-2F0A-49A0-B18A-8CE394CF327D}" type="datetimeFigureOut">
               <a:rPr lang="ru-RU" smtClean="0"/>
-              <a:t>21.12.2025</a:t>
+              <a:t>09.01.2026</a:t>
             </a:fld>
             <a:endParaRPr lang="ru-RU"/>
           </a:p>
@@ -1305,7 +1305,7 @@
           <a:p>
             <a:fld id="{64CE43B8-2F0A-49A0-B18A-8CE394CF327D}" type="datetimeFigureOut">
               <a:rPr lang="ru-RU" smtClean="0"/>
-              <a:t>21.12.2025</a:t>
+              <a:t>09.01.2026</a:t>
             </a:fld>
             <a:endParaRPr lang="ru-RU"/>
           </a:p>
@@ -1580,7 +1580,7 @@
           <a:p>
             <a:fld id="{64CE43B8-2F0A-49A0-B18A-8CE394CF327D}" type="datetimeFigureOut">
               <a:rPr lang="ru-RU" smtClean="0"/>
-              <a:t>21.12.2025</a:t>
+              <a:t>09.01.2026</a:t>
             </a:fld>
             <a:endParaRPr lang="ru-RU"/>
           </a:p>
@@ -1845,7 +1845,7 @@
           <a:p>
             <a:fld id="{64CE43B8-2F0A-49A0-B18A-8CE394CF327D}" type="datetimeFigureOut">
               <a:rPr lang="ru-RU" smtClean="0"/>
-              <a:t>21.12.2025</a:t>
+              <a:t>09.01.2026</a:t>
             </a:fld>
             <a:endParaRPr lang="ru-RU"/>
           </a:p>
@@ -2257,7 +2257,7 @@
           <a:p>
             <a:fld id="{64CE43B8-2F0A-49A0-B18A-8CE394CF327D}" type="datetimeFigureOut">
               <a:rPr lang="ru-RU" smtClean="0"/>
-              <a:t>21.12.2025</a:t>
+              <a:t>09.01.2026</a:t>
             </a:fld>
             <a:endParaRPr lang="ru-RU"/>
           </a:p>
@@ -2398,7 +2398,7 @@
           <a:p>
             <a:fld id="{64CE43B8-2F0A-49A0-B18A-8CE394CF327D}" type="datetimeFigureOut">
               <a:rPr lang="ru-RU" smtClean="0"/>
-              <a:t>21.12.2025</a:t>
+              <a:t>09.01.2026</a:t>
             </a:fld>
             <a:endParaRPr lang="ru-RU"/>
           </a:p>
@@ -2511,7 +2511,7 @@
           <a:p>
             <a:fld id="{64CE43B8-2F0A-49A0-B18A-8CE394CF327D}" type="datetimeFigureOut">
               <a:rPr lang="ru-RU" smtClean="0"/>
-              <a:t>21.12.2025</a:t>
+              <a:t>09.01.2026</a:t>
             </a:fld>
             <a:endParaRPr lang="ru-RU"/>
           </a:p>
@@ -2822,7 +2822,7 @@
           <a:p>
             <a:fld id="{64CE43B8-2F0A-49A0-B18A-8CE394CF327D}" type="datetimeFigureOut">
               <a:rPr lang="ru-RU" smtClean="0"/>
-              <a:t>21.12.2025</a:t>
+              <a:t>09.01.2026</a:t>
             </a:fld>
             <a:endParaRPr lang="ru-RU"/>
           </a:p>
@@ -3110,7 +3110,7 @@
           <a:p>
             <a:fld id="{64CE43B8-2F0A-49A0-B18A-8CE394CF327D}" type="datetimeFigureOut">
               <a:rPr lang="ru-RU" smtClean="0"/>
-              <a:t>21.12.2025</a:t>
+              <a:t>09.01.2026</a:t>
             </a:fld>
             <a:endParaRPr lang="ru-RU"/>
           </a:p>
@@ -3351,7 +3351,7 @@
           <a:p>
             <a:fld id="{64CE43B8-2F0A-49A0-B18A-8CE394CF327D}" type="datetimeFigureOut">
               <a:rPr lang="ru-RU" smtClean="0"/>
-              <a:t>21.12.2025</a:t>
+              <a:t>09.01.2026</a:t>
             </a:fld>
             <a:endParaRPr lang="ru-RU"/>
           </a:p>
@@ -3797,7 +3797,7 @@
           <a:lstStyle/>
           <a:p>
             <a:r>
-              <a:rPr lang="en-US" sz="7200" b="1" dirty="0">
+              <a:rPr lang="en-US" sz="7200" dirty="0">
                 <a:solidFill>
                   <a:srgbClr val="0070C0"/>
                 </a:solidFill>
@@ -3806,7 +3806,7 @@
               </a:rPr>
               <a:t>The evolution of AI</a:t>
             </a:r>
-            <a:endParaRPr lang="ru-RU" sz="7200" b="1" dirty="0">
+            <a:endParaRPr lang="ru-RU" sz="7200" dirty="0">
               <a:solidFill>
                 <a:srgbClr val="0070C0"/>
               </a:solidFill>
